--- a/lectures/Lecture 4.1 Testing.pptx
+++ b/lectures/Lecture 4.1 Testing.pptx
@@ -1317,7 +1317,7 @@
             </a:pPr>
             <a:r>
               <a:rPr lang="en-US"/>
-              <a:t>Work through each point and tie it back to a strategy on the board. 'Run it with example inputs' fails #1 and #2. 'Read it line by line' fails #3 and #4. Etc. The critique is not that the strategies are wrong. It's that they don't compose.</a:t>
+              <a:t>Work through each point and tie it back to a strategy on the board - 'run it with example inputs' fails #1 and #2, 'read it line by line' fails #3 and #4, and so on. None of these strategies are wrong on their own, they just don't compose into anything you can lean on.</a:t>
             </a:r>
             <a:endParaRPr/>
           </a:p>
@@ -1468,7 +1468,7 @@
             </a:pPr>
             <a:r>
               <a:rPr lang="en-US"/>
-              <a:t>Work through each point and tie it back to a strategy on the board. 'Run it with example inputs' fails #1 and #2. 'Read it line by line' fails #3 and #4. Etc. The critique is not that the strategies are wrong. It's that they don't compose.</a:t>
+              <a:t>Work through each point and tie it back to a strategy on the board - 'run it with example inputs' fails #1 and #2, 'read it line by line' fails #3 and #4, and so on. None of these strategies are wrong on their own, they just don't compose into anything you can lean on.</a:t>
             </a:r>
             <a:endParaRPr/>
           </a:p>
@@ -1619,7 +1619,7 @@
             </a:pPr>
             <a:r>
               <a:rPr lang="en-US"/>
-              <a:t>Work through each point and tie it back to a strategy on the board. 'Run it with example inputs' fails #1 and #2. 'Read it line by line' fails #3 and #4. Etc. The critique is not that the strategies are wrong. It's that they don't compose.</a:t>
+              <a:t>Work through each point and tie it back to a strategy on the board - 'run it with example inputs' fails #1 and #2, 'read it line by line' fails #3 and #4, and so on. None of these strategies are wrong on their own, they just don't compose into anything you can lean on.</a:t>
             </a:r>
             <a:endParaRPr/>
           </a:p>
@@ -1770,7 +1770,7 @@
             </a:pPr>
             <a:r>
               <a:rPr lang="en-US"/>
-              <a:t>Work through each point and tie it back to a strategy on the board. 'Run it with example inputs' fails #1 and #2. 'Read it line by line' fails #3 and #4. Etc. The critique is not that the strategies are wrong. It's that they don't compose.</a:t>
+              <a:t>Work through each point and tie it back to a strategy on the board - 'run it with example inputs' fails #1 and #2, 'read it line by line' fails #3 and #4, and so on. None of these strategies are wrong on their own, they just don't compose into anything you can lean on.</a:t>
             </a:r>
             <a:endParaRPr/>
           </a:p>
@@ -1921,7 +1921,7 @@
             </a:pPr>
             <a:r>
               <a:rPr lang="en-US"/>
-              <a:t>Work through each point and tie it back to a strategy on the board. 'Run it with example inputs' fails #1 and #2. 'Read it line by line' fails #3 and #4. Etc. The critique is not that the strategies are wrong. It's that they don't compose.</a:t>
+              <a:t>Work through each point and tie it back to a strategy on the board - 'run it with example inputs' fails #1 and #2, 'read it line by line' fails #3 and #4, and so on. None of these strategies are wrong on their own, they just don't compose into anything you can lean on.</a:t>
             </a:r>
             <a:endParaRPr/>
           </a:p>
@@ -2072,7 +2072,7 @@
             </a:pPr>
             <a:r>
               <a:rPr lang="en-US"/>
-              <a:t>This is the frame for the rest of the lecture. Tests are not bureaucratic safety theater. They're the solution to the human brain being too small for modern software. If students buy this framing, everything else follows.</a:t>
+              <a:t>This is the frame for the rest of the lecture and it's worth landing hard: tests exist because the human brain is too small to hold modern software in it, which is a pretty different pitch than tests as bureaucratic safety theater. If they buy this framing, everything else follows on its own.</a:t>
             </a:r>
             <a:endParaRPr/>
           </a:p>
@@ -2223,7 +2223,7 @@
             </a:pPr>
             <a:r>
               <a:rPr lang="en-US"/>
-              <a:t>This is the frame for the rest of the lecture. Tests are not bureaucratic safety theater. They're the solution to the human brain being too small for modern software. If students buy this framing, everything else follows.</a:t>
+              <a:t>This is the frame for the rest of the lecture and it's worth landing hard: tests exist because the human brain is too small to hold modern software in it, which is a pretty different pitch than tests as bureaucratic safety theater. If they buy this framing, everything else follows on its own.</a:t>
             </a:r>
             <a:endParaRPr/>
           </a:p>
@@ -2374,7 +2374,7 @@
             </a:pPr>
             <a:r>
               <a:rPr lang="en-US"/>
-              <a:t>This is the frame for the rest of the lecture. Tests are not bureaucratic safety theater. They're the solution to the human brain being too small for modern software. If students buy this framing, everything else follows.</a:t>
+              <a:t>This is the frame for the rest of the lecture and it's worth landing hard: tests exist because the human brain is too small to hold modern software in it, which is a pretty different pitch than tests as bureaucratic safety theater. If they buy this framing, everything else follows on its own.</a:t>
             </a:r>
             <a:endParaRPr/>
           </a:p>
@@ -2826,7 +2826,7 @@
             </a:pPr>
             <a:r>
               <a:rPr lang="en-US"/>
-              <a:t>The point is friction. Anything that takes more than one line to write will not get written. pytest wins because its hello world is two lines of code and plain `assert`.</a:t>
+              <a:t>It all comes down to friction, because anything that takes more than a line to write is not gonna get written. pytest wins on exactly that - its hello world is two lines and a plain `assert`.</a:t>
             </a:r>
             <a:endParaRPr/>
           </a:p>
@@ -3429,7 +3429,7 @@
             </a:pPr>
             <a:r>
               <a:rPr lang="en-US"/>
-              <a:t>Combine the old AAA concept slide and AAA code slide into one. The same shipping_cost function from the live demo, now cleanly formatted. Point at each comment and name the phase. Blank lines between phases make the structure pop visually. Tell students: if you take one habit from this lecture, make it this one. It costs nothing and compounds forever.</a:t>
+              <a:t>Combine the old AAA concept slide and AAA code slide into one. The same shipping_cost function from the live demo, now cleanly formatted. Point at each comment and name the phase. Blank lines between phases make the structure pop visually. Tell them straight out that if they take one habit from this lecture it should be this one, because it costs basically nothing to do and it makes every test they write after this easier to read.</a:t>
             </a:r>
             <a:endParaRPr/>
           </a:p>
@@ -4532,7 +4532,7 @@
             </a:pPr>
             <a:r>
               <a:rPr lang="en-US"/>
-              <a:t>Everything so far has been 'tests are executable memory.' Now: tests are also a design tool, and that might be the more important benefit.</a:t>
+              <a:t>Everything up to here has been tests as executable memory. Now they're also a design tool, and honestly that might be the half that matters more.</a:t>
             </a:r>
             <a:endParaRPr/>
           </a:p>
@@ -5167,7 +5167,7 @@
             </a:pPr>
             <a:r>
               <a:rPr lang="en-US"/>
-              <a:t>This is the insight most students won't have heard before. TDD isn't about test coverage or catching bugs. Those are downstream effects. It's about being forced to make design decisions at the moment when they're cheapest to change.</a:t>
+              <a:t>This is the part most students won't have heard before. Coverage and catching bugs are downstream effects of TDD, and the actual mechanism is that it forces you into the design decisions at the moment they're cheapest to change.</a:t>
             </a:r>
             <a:endParaRPr/>
           </a:p>
@@ -5515,7 +5515,7 @@
             </a:pPr>
             <a:r>
               <a:rPr lang="en-US"/>
-              <a:t>The exercise is partly about the answers and partly about noticing that you can't fill in the blanks without making design decisions: should 1024 be '1 KB' or '1.0 KB'? Should 0 be '0 B' or '0 bytes' or '0'? There are no wrong answers, only decisions.</a:t>
+              <a:t>The exercise is partly about the answers and partly about noticing that you can't fill in the blanks without making design decisions: should 1024 be '1 KB' or '1.0 KB'? Should 0 be '0 B' or '0 bytes' or '0'? There aren't wrong answers here, just decisions somebody has to make.</a:t>
             </a:r>
             <a:endParaRPr/>
           </a:p>
@@ -5670,7 +5670,7 @@
             </a:r>
             <a:r>
               <a:rPr lang="en-US"/>
-              <a:t>he exercise is partly about the answers and partly about noticing that you can't fill in the blanks without making design decisions: should 1024 be '1 KB' or '1.0 KB'? Should 0 be '0 B' or '0 bytes' or '0'? There are no wrong answers, only decisions.</a:t>
+              <a:t>he exercise is partly about the answers and partly about noticing that you can't fill in the blanks without making design decisions: should 1024 be '1 KB' or '1.0 KB'? Should 0 be '0 B' or '0 bytes' or '0'? There aren't wrong answers here, just decisions somebody has to make.</a:t>
             </a:r>
             <a:endParaRPr/>
           </a:p>
@@ -5821,7 +5821,7 @@
             </a:pPr>
             <a:r>
               <a:rPr lang="en-US"/>
-              <a:t>Walk through the implementation and point at each line where a test pinned down a decision. The integer-vs-float formatting is the cleanest example: test_small_number_of_bytes forced us to use no decimals for bytes, while test_exactly_one_kilobyte forced us to use one decimal for everything else. We didn't decide that separately. The tests made us commit before we wrote any code.</a:t>
+              <a:t>Walk through the implementation and point at each line where a test pinned down a decision. The integer-vs-float formatting is the cleanest example: test_small_number_of_bytes forced us to use no decimals for bytes, while test_exactly_one_kilobyte forced us to use one decimal for everything else. Nobody sat down and decided that separately - the tests made us commit to it before a line of the implementation existed.</a:t>
             </a:r>
             <a:endParaRPr/>
           </a:p>
@@ -6576,7 +6576,7 @@
             </a:pPr>
             <a:r>
               <a:rPr lang="en-US"/>
-              <a:t>Every item on the list becomes a mini-section of this lecture. The phrase 'control the world around your code' is the central insight. Keep pointing back to it.</a:t>
+              <a:t>Every item on this list turns into a mini-section of the lecture, and 'control the world around your code' is the phrase to keep coming back to.</a:t>
             </a:r>
             <a:endParaRPr/>
           </a:p>
@@ -7527,7 +7527,7 @@
             </a:pPr>
             <a:r>
               <a:rPr lang="en-US"/>
-              <a:t>We're not attacking manual verification, we're attacking one specific, inadequate kind of testing.</a:t>
+              <a:t>Careful here - what we're picking apart is one specific inadequate kind of testing, not the idea of checking your work by hand.</a:t>
             </a:r>
             <a:endParaRPr/>
           </a:p>

--- a/lectures/Lecture 4.1 Testing.pptx
+++ b/lectures/Lecture 4.1 Testing.pptx
@@ -976,48 +976,9 @@
           </a:bodyPr>
           <a:lstStyle/>
           <a:p>
-            <a:pPr indent="0" lvl="0" marL="0" rtl="0" algn="l">
-              <a:spcBef>
-                <a:spcPts val="0"/>
-              </a:spcBef>
-              <a:spcAft>
-                <a:spcPts val="0"/>
-              </a:spcAft>
-              <a:buClr>
-                <a:schemeClr val="dk1"/>
-              </a:buClr>
-              <a:buSzPts val="1100"/>
-              <a:buFont typeface="Arial"/>
-              <a:buNone/>
-            </a:pPr>
-            <a:r>
-              <a:rPr lang="en-US">
-                <a:solidFill>
-                  <a:schemeClr val="dk1"/>
-                </a:solidFill>
-              </a:rPr>
-              <a:t>You will hear: (a) 'run it with some example inputs and check the output' - the manual verification baseline. (b) 'put print statements in' - variation on (a). (c) 'read it line by line' - code review. (d) 'ask someone else to look at it' - peer review. (e) maybe: 'try weird inputs, like negative weight' - edge case thinking. All valid, all manual. Leave the list on the board; we're about to pick it apart one item at a time.</a:t>
-            </a:r>
-            <a:endParaRPr>
-              <a:solidFill>
-                <a:schemeClr val="dk1"/>
-              </a:solidFill>
-            </a:endParaRPr>
-          </a:p>
-          <a:p>
-            <a:pPr indent="0" lvl="0" marL="0" rtl="0" algn="l">
-              <a:spcBef>
-                <a:spcPts val="0"/>
-              </a:spcBef>
-              <a:spcAft>
-                <a:spcPts val="0"/>
-              </a:spcAft>
-              <a:buNone/>
-            </a:pPr>
-            <a:r>
-              <a:t/>
-            </a:r>
-            <a:endParaRPr/>
+            <a:r>
+              <a:t>Expect: example inputs, prints, read line by line, peer review, weird inputs. List on board.</a:t>
+            </a:r>
           </a:p>
         </p:txBody>
       </p:sp>
@@ -1154,22 +1115,7 @@
             <a:noAutofit/>
           </a:bodyPr>
           <a:lstStyle/>
-          <a:p>
-            <a:pPr indent="0" lvl="0" marL="0" rtl="0" algn="l">
-              <a:spcBef>
-                <a:spcPts val="0"/>
-              </a:spcBef>
-              <a:spcAft>
-                <a:spcPts val="0"/>
-              </a:spcAft>
-              <a:buNone/>
-            </a:pPr>
-            <a:r>
-              <a:rPr lang="en-US"/>
-              <a:t>Now we pick apart the strategies students just named. Every pain point should land on something from the board.</a:t>
-            </a:r>
-            <a:endParaRPr/>
-          </a:p>
+          <a:p/>
         </p:txBody>
       </p:sp>
       <p:sp>
@@ -1306,20 +1252,9 @@
           </a:bodyPr>
           <a:lstStyle/>
           <a:p>
-            <a:pPr indent="0" lvl="0" marL="0" rtl="0" algn="l">
-              <a:spcBef>
-                <a:spcPts val="0"/>
-              </a:spcBef>
-              <a:spcAft>
-                <a:spcPts val="0"/>
-              </a:spcAft>
-              <a:buNone/>
-            </a:pPr>
-            <a:r>
-              <a:rPr lang="en-US"/>
-              <a:t>Work through each point and tie it back to a strategy on the board - 'run it with example inputs' fails #1 and #2, 'read it line by line' fails #3 and #4, and so on. None of these strategies are wrong on their own, they just don't compose into anything you can lean on.</a:t>
-            </a:r>
-            <a:endParaRPr/>
+            <a:r>
+              <a:t>Map each point to the board: example inputs fails 1-2, line-by-line fails 3-4.</a:t>
+            </a:r>
           </a:p>
         </p:txBody>
       </p:sp>
@@ -1457,20 +1392,9 @@
           </a:bodyPr>
           <a:lstStyle/>
           <a:p>
-            <a:pPr indent="0" lvl="0" marL="0" rtl="0" algn="l">
-              <a:spcBef>
-                <a:spcPts val="0"/>
-              </a:spcBef>
-              <a:spcAft>
-                <a:spcPts val="0"/>
-              </a:spcAft>
-              <a:buNone/>
-            </a:pPr>
-            <a:r>
-              <a:rPr lang="en-US"/>
-              <a:t>Work through each point and tie it back to a strategy on the board - 'run it with example inputs' fails #1 and #2, 'read it line by line' fails #3 and #4, and so on. None of these strategies are wrong on their own, they just don't compose into anything you can lean on.</a:t>
-            </a:r>
-            <a:endParaRPr/>
+            <a:r>
+              <a:t>Map each point to the board: example inputs fails 1-2, line-by-line fails 3-4.</a:t>
+            </a:r>
           </a:p>
         </p:txBody>
       </p:sp>
@@ -1608,20 +1532,9 @@
           </a:bodyPr>
           <a:lstStyle/>
           <a:p>
-            <a:pPr indent="0" lvl="0" marL="0" rtl="0" algn="l">
-              <a:spcBef>
-                <a:spcPts val="0"/>
-              </a:spcBef>
-              <a:spcAft>
-                <a:spcPts val="0"/>
-              </a:spcAft>
-              <a:buNone/>
-            </a:pPr>
-            <a:r>
-              <a:rPr lang="en-US"/>
-              <a:t>Work through each point and tie it back to a strategy on the board - 'run it with example inputs' fails #1 and #2, 'read it line by line' fails #3 and #4, and so on. None of these strategies are wrong on their own, they just don't compose into anything you can lean on.</a:t>
-            </a:r>
-            <a:endParaRPr/>
+            <a:r>
+              <a:t>Map each point to the board: example inputs fails 1-2, line-by-line fails 3-4.</a:t>
+            </a:r>
           </a:p>
         </p:txBody>
       </p:sp>
@@ -1759,20 +1672,9 @@
           </a:bodyPr>
           <a:lstStyle/>
           <a:p>
-            <a:pPr indent="0" lvl="0" marL="0" rtl="0" algn="l">
-              <a:spcBef>
-                <a:spcPts val="0"/>
-              </a:spcBef>
-              <a:spcAft>
-                <a:spcPts val="0"/>
-              </a:spcAft>
-              <a:buNone/>
-            </a:pPr>
-            <a:r>
-              <a:rPr lang="en-US"/>
-              <a:t>Work through each point and tie it back to a strategy on the board - 'run it with example inputs' fails #1 and #2, 'read it line by line' fails #3 and #4, and so on. None of these strategies are wrong on their own, they just don't compose into anything you can lean on.</a:t>
-            </a:r>
-            <a:endParaRPr/>
+            <a:r>
+              <a:t>Map each point to the board: example inputs fails 1-2, line-by-line fails 3-4.</a:t>
+            </a:r>
           </a:p>
         </p:txBody>
       </p:sp>
@@ -1910,20 +1812,9 @@
           </a:bodyPr>
           <a:lstStyle/>
           <a:p>
-            <a:pPr indent="0" lvl="0" marL="0" rtl="0" algn="l">
-              <a:spcBef>
-                <a:spcPts val="0"/>
-              </a:spcBef>
-              <a:spcAft>
-                <a:spcPts val="0"/>
-              </a:spcAft>
-              <a:buNone/>
-            </a:pPr>
-            <a:r>
-              <a:rPr lang="en-US"/>
-              <a:t>Work through each point and tie it back to a strategy on the board - 'run it with example inputs' fails #1 and #2, 'read it line by line' fails #3 and #4, and so on. None of these strategies are wrong on their own, they just don't compose into anything you can lean on.</a:t>
-            </a:r>
-            <a:endParaRPr/>
+            <a:r>
+              <a:t>Map each point to the board: example inputs fails 1-2, line-by-line fails 3-4.</a:t>
+            </a:r>
           </a:p>
         </p:txBody>
       </p:sp>
@@ -2061,20 +1952,9 @@
           </a:bodyPr>
           <a:lstStyle/>
           <a:p>
-            <a:pPr indent="0" lvl="0" marL="0" rtl="0" algn="l">
-              <a:spcBef>
-                <a:spcPts val="0"/>
-              </a:spcBef>
-              <a:spcAft>
-                <a:spcPts val="0"/>
-              </a:spcAft>
-              <a:buNone/>
-            </a:pPr>
-            <a:r>
-              <a:rPr lang="en-US"/>
-              <a:t>This is the frame for the rest of the lecture and it's worth landing hard: tests exist because the human brain is too small to hold modern software in it, which is a pretty different pitch than tests as bureaucratic safety theater. If they buy this framing, everything else follows on its own.</a:t>
-            </a:r>
-            <a:endParaRPr/>
+            <a:r>
+              <a:t>Contrast with tests as bureaucratic safety theater.</a:t>
+            </a:r>
           </a:p>
         </p:txBody>
       </p:sp>
@@ -2212,20 +2092,9 @@
           </a:bodyPr>
           <a:lstStyle/>
           <a:p>
-            <a:pPr indent="0" lvl="0" marL="0" rtl="0" algn="l">
-              <a:spcBef>
-                <a:spcPts val="0"/>
-              </a:spcBef>
-              <a:spcAft>
-                <a:spcPts val="0"/>
-              </a:spcAft>
-              <a:buNone/>
-            </a:pPr>
-            <a:r>
-              <a:rPr lang="en-US"/>
-              <a:t>This is the frame for the rest of the lecture and it's worth landing hard: tests exist because the human brain is too small to hold modern software in it, which is a pretty different pitch than tests as bureaucratic safety theater. If they buy this framing, everything else follows on its own.</a:t>
-            </a:r>
-            <a:endParaRPr/>
+            <a:r>
+              <a:t>Contrast with tests as bureaucratic safety theater.</a:t>
+            </a:r>
           </a:p>
         </p:txBody>
       </p:sp>
@@ -2363,20 +2232,9 @@
           </a:bodyPr>
           <a:lstStyle/>
           <a:p>
-            <a:pPr indent="0" lvl="0" marL="0" rtl="0" algn="l">
-              <a:spcBef>
-                <a:spcPts val="0"/>
-              </a:spcBef>
-              <a:spcAft>
-                <a:spcPts val="0"/>
-              </a:spcAft>
-              <a:buNone/>
-            </a:pPr>
-            <a:r>
-              <a:rPr lang="en-US"/>
-              <a:t>This is the frame for the rest of the lecture and it's worth landing hard: tests exist because the human brain is too small to hold modern software in it, which is a pretty different pitch than tests as bureaucratic safety theater. If they buy this framing, everything else follows on its own.</a:t>
-            </a:r>
-            <a:endParaRPr/>
+            <a:r>
+              <a:t>Contrast with tests as bureaucratic safety theater.</a:t>
+            </a:r>
           </a:p>
         </p:txBody>
       </p:sp>
@@ -2514,19 +2372,9 @@
           </a:bodyPr>
           <a:lstStyle/>
           <a:p>
-            <a:pPr indent="0" lvl="0" marL="0" rtl="0" algn="l">
-              <a:spcBef>
-                <a:spcPts val="0"/>
-              </a:spcBef>
-              <a:spcAft>
-                <a:spcPts val="0"/>
-              </a:spcAft>
-              <a:buNone/>
-            </a:pPr>
-            <a:r>
-              <a:t/>
-            </a:r>
-            <a:endParaRPr/>
+            <a:r>
+              <a:t>Collect guesses before revealing.</a:t>
+            </a:r>
           </a:p>
         </p:txBody>
       </p:sp>
@@ -2663,22 +2511,7 @@
             <a:noAutofit/>
           </a:bodyPr>
           <a:lstStyle/>
-          <a:p>
-            <a:pPr indent="0" lvl="0" marL="0" rtl="0" algn="l">
-              <a:spcBef>
-                <a:spcPts val="0"/>
-              </a:spcBef>
-              <a:spcAft>
-                <a:spcPts val="0"/>
-              </a:spcAft>
-              <a:buNone/>
-            </a:pPr>
-            <a:r>
-              <a:rPr lang="en-US"/>
-              <a:t>Now the tool. Lighter than before: one framing slide, one conventions slide, a LIVE coding moment, and AAA. The live demo replaces three static slides from the old version.</a:t>
-            </a:r>
-            <a:endParaRPr/>
-          </a:p>
+          <a:p/>
         </p:txBody>
       </p:sp>
       <p:sp>
@@ -2815,20 +2648,9 @@
           </a:bodyPr>
           <a:lstStyle/>
           <a:p>
-            <a:pPr indent="0" lvl="0" marL="0" rtl="0" algn="l">
-              <a:spcBef>
-                <a:spcPts val="0"/>
-              </a:spcBef>
-              <a:spcAft>
-                <a:spcPts val="0"/>
-              </a:spcAft>
-              <a:buNone/>
-            </a:pPr>
-            <a:r>
-              <a:rPr lang="en-US"/>
-              <a:t>It all comes down to friction, because anything that takes more than a line to write is not gonna get written. pytest wins on exactly that - its hello world is two lines and a plain `assert`.</a:t>
-            </a:r>
-            <a:endParaRPr/>
+            <a:r>
+              <a:t>Friction argument: pytest hello world is two lines, plain `assert`.</a:t>
+            </a:r>
           </a:p>
         </p:txBody>
       </p:sp>
@@ -2966,20 +2788,9 @@
           </a:bodyPr>
           <a:lstStyle/>
           <a:p>
-            <a:pPr indent="0" lvl="0" marL="0" rtl="0" algn="l">
-              <a:spcBef>
-                <a:spcPts val="0"/>
-              </a:spcBef>
-              <a:spcAft>
-                <a:spcPts val="0"/>
-              </a:spcAft>
-              <a:buNone/>
-            </a:pPr>
-            <a:r>
-              <a:rPr lang="en-US"/>
-              <a:t>Deliberately short. Students don't need a read-along hello world because we're about to write one live. Land the three rules and move to the live slide.</a:t>
-            </a:r>
-            <a:endParaRPr/>
+            <a:r>
+              <a:t>Go fast, live demo next.</a:t>
+            </a:r>
           </a:p>
         </p:txBody>
       </p:sp>
@@ -3117,20 +2928,9 @@
           </a:bodyPr>
           <a:lstStyle/>
           <a:p>
-            <a:pPr indent="0" lvl="0" marL="0" rtl="0" algn="l">
-              <a:spcBef>
-                <a:spcPts val="0"/>
-              </a:spcBef>
-              <a:spcAft>
-                <a:spcPts val="0"/>
-              </a:spcAft>
-              <a:buNone/>
-            </a:pPr>
-            <a:r>
-              <a:rPr lang="en-US"/>
-              <a:t>THIS IS A LIVE CODING SLIDE. Suggested script: (1) Open an empty test_shipping.py next to shipping.py in the editor, projector up. (2) Ask the class: 'give me a scenario.' You will hear '1 pound, $10 subtotal' or similar. Type the test in real time: `def test_flat_rate_under_2_lb():\n    assert shipping_cost(1.0, 10.0) == 5.99`. (3) Keep going until you have 3-4 tests covering: flat rate, over 2 lb surcharge, free shipping over $50, maybe exactly 2 lb or exactly $50 (edge cases). (4) Run `pytest -v` in the terminal. Watch it go green. Students see the per-test output live. (5) Comment out the `if subtotal &gt;= 50.0: return 0.0` lines. Run pytest again. The free-shipping test fails with assertion introspection: `assert 5.99 == 0.0`. Point at the output. Say: 'that's assertion introspection. We never wrote an error message and it told us exactly what broke.' (6) Restore the function, tests green again, move on to AAA. Total time: 5-7 minutes.</a:t>
-            </a:r>
-            <a:endParaRPr/>
+            <a:r>
+              <a:t>Live, 5-7 min: 3-4 tests, `pytest -v`, break free-shipping branch, show introspection output.</a:t>
+            </a:r>
           </a:p>
         </p:txBody>
       </p:sp>
@@ -3418,20 +3218,9 @@
           </a:bodyPr>
           <a:lstStyle/>
           <a:p>
-            <a:pPr indent="0" lvl="0" marL="0" rtl="0" algn="l">
-              <a:spcBef>
-                <a:spcPts val="0"/>
-              </a:spcBef>
-              <a:spcAft>
-                <a:spcPts val="0"/>
-              </a:spcAft>
-              <a:buNone/>
-            </a:pPr>
-            <a:r>
-              <a:rPr lang="en-US"/>
-              <a:t>Combine the old AAA concept slide and AAA code slide into one. The same shipping_cost function from the live demo, now cleanly formatted. Point at each comment and name the phase. Blank lines between phases make the structure pop visually. Tell them straight out that if they take one habit from this lecture it should be this one, because it costs basically nothing to do and it makes every test they write after this easier to read.</a:t>
-            </a:r>
-            <a:endParaRPr/>
+            <a:r>
+              <a:t>Name each phase. One habit to take from this lecture.</a:t>
+            </a:r>
           </a:p>
         </p:txBody>
       </p:sp>
@@ -3569,67 +3358,9 @@
           </a:bodyPr>
           <a:lstStyle/>
           <a:p>
-            <a:pPr indent="0" lvl="0" marL="0" rtl="0" algn="l">
-              <a:spcBef>
-                <a:spcPts val="0"/>
-              </a:spcBef>
-              <a:spcAft>
-                <a:spcPts val="0"/>
-              </a:spcAft>
-              <a:buNone/>
-            </a:pPr>
-            <a:r>
-              <a:rPr lang="en-US"/>
-              <a:t># Both check the same three things. Which would you rather debug</a:t>
-            </a:r>
-            <a:endParaRPr/>
-          </a:p>
-          <a:p>
-            <a:pPr indent="0" lvl="0" marL="0" rtl="0" algn="l">
-              <a:spcBef>
-                <a:spcPts val="0"/>
-              </a:spcBef>
-              <a:spcAft>
-                <a:spcPts val="0"/>
-              </a:spcAft>
-              <a:buNone/>
-            </a:pPr>
-            <a:r>
-              <a:rPr lang="en-US"/>
-              <a:t># at 11pm when something broke in production?</a:t>
-            </a:r>
-            <a:endParaRPr/>
-          </a:p>
-          <a:p>
-            <a:pPr indent="0" lvl="0" marL="0" rtl="0" algn="l">
-              <a:spcBef>
-                <a:spcPts val="0"/>
-              </a:spcBef>
-              <a:spcAft>
-                <a:spcPts val="0"/>
-              </a:spcAft>
-              <a:buNone/>
-            </a:pPr>
-            <a:r>
-              <a:t/>
-            </a:r>
-            <a:endParaRPr/>
-          </a:p>
-          <a:p>
-            <a:pPr indent="0" lvl="0" marL="0" rtl="0" algn="l">
-              <a:spcBef>
-                <a:spcPts val="0"/>
-              </a:spcBef>
-              <a:spcAft>
-                <a:spcPts val="0"/>
-              </a:spcAft>
-              <a:buNone/>
-            </a:pPr>
-            <a:r>
-              <a:rPr lang="en-US"/>
-              <a:t>DISCUSSION SLIDE. Give the class 30 seconds to read, then cold-call. Expect: 'Version B, because when it fails you know which scenario broke.' Press on it. What else? (a) The names in B are documentation - anyone reading the test file learns the shipping rules by reading test names. (b) In A, if the first assert fails, the second and third never run. You might have three bugs and only see one. (c) B is easier to add a fourth test to - you just add another function. In A you're editing one big one. Draw out these points from students rather than listing them. This discussion sets up the properties slide perfectly.</a:t>
-            </a:r>
-            <a:endParaRPr/>
+            <a:r>
+              <a:t>30 sec, cold-call. Answer B: failure names scenario, A stops at first failing assert.</a:t>
+            </a:r>
           </a:p>
         </p:txBody>
       </p:sp>
@@ -3767,20 +3498,9 @@
           </a:bodyPr>
           <a:lstStyle/>
           <a:p>
-            <a:pPr indent="0" lvl="0" marL="0" rtl="0" algn="l">
-              <a:spcBef>
-                <a:spcPts val="0"/>
-              </a:spcBef>
-              <a:spcAft>
-                <a:spcPts val="0"/>
-              </a:spcAft>
-              <a:buNone/>
-            </a:pPr>
-            <a:r>
-              <a:rPr lang="en-US"/>
-              <a:t>Most of these came out of the last discussion. Go quickly; students have already internalized the first two. Spend the most time on deterministic and independent, which are newer to them and will come up in 4.2 when we talk about databases and fixtures.</a:t>
-            </a:r>
-            <a:endParaRPr/>
+            <a:r>
+              <a:t>Go quickly. Most time on deterministic and independent, both return in 4.2.</a:t>
+            </a:r>
           </a:p>
         </p:txBody>
       </p:sp>
@@ -3918,20 +3638,9 @@
           </a:bodyPr>
           <a:lstStyle/>
           <a:p>
-            <a:pPr indent="0" lvl="0" marL="0" rtl="0" algn="l">
-              <a:spcBef>
-                <a:spcPts val="0"/>
-              </a:spcBef>
-              <a:spcAft>
-                <a:spcPts val="0"/>
-              </a:spcAft>
-              <a:buNone/>
-            </a:pPr>
-            <a:r>
-              <a:rPr lang="en-US"/>
-              <a:t>pytest.raises is how you test that something SHOULD raise. Without it, the exception would propagate out of the test and fail it. With it, the test passes when the exception fires and fails when it doesn't. The match= argument lets you check the error message too. Short slide; this is the only new pytest mechanic in the lecture.</a:t>
-            </a:r>
-            <a:endParaRPr/>
+            <a:r>
+              <a:t>Only new pytest mechanic. Without `raises` the exception fails the test. `match=` checks message.</a:t>
+            </a:r>
           </a:p>
         </p:txBody>
       </p:sp>
@@ -4069,20 +3778,9 @@
           </a:bodyPr>
           <a:lstStyle/>
           <a:p>
-            <a:pPr indent="0" lvl="0" marL="0" rtl="0" algn="l">
-              <a:spcBef>
-                <a:spcPts val="0"/>
-              </a:spcBef>
-              <a:spcAft>
-                <a:spcPts val="0"/>
-              </a:spcAft>
-              <a:buNone/>
-            </a:pPr>
-            <a:r>
-              <a:rPr lang="en-US"/>
-              <a:t>pytest.raises is how you test that something SHOULD raise. Without it, the exception would propagate out of the test and fail it. With it, the test passes when the exception fires and fails when it doesn't. The match= argument lets you check the error message too. Short slide; this is the only new pytest mechanic in the lecture.</a:t>
-            </a:r>
-            <a:endParaRPr/>
+            <a:r>
+              <a:t>Only new pytest mechanic. Without `raises` the exception fails the test. `match=` checks message.</a:t>
+            </a:r>
           </a:p>
         </p:txBody>
       </p:sp>
@@ -4370,20 +4068,9 @@
           </a:bodyPr>
           <a:lstStyle/>
           <a:p>
-            <a:pPr indent="0" lvl="0" marL="0" rtl="0" algn="l">
-              <a:spcBef>
-                <a:spcPts val="0"/>
-              </a:spcBef>
-              <a:spcAft>
-                <a:spcPts val="0"/>
-              </a:spcAft>
-              <a:buNone/>
-            </a:pPr>
-            <a:r>
-              <a:rPr lang="en-US"/>
-              <a:t>DISCUSSION SLIDE. Give the class a minute to read, then ask them to raise hands for each option. Expect most of the class to correctly pick C and D. Work through the wrong ones:   A tests PYTHON. Python is tested thousands of times by other people. You are not going to find a bug in `+`.   B tests SQLITE. Same problem. The sqlite team has this covered. If you need a sanity check that sqlite works, you have bigger problems.   C tests YOUR endpoint end-to-end - valuable.   D tests YOUR shipping_cost with a real business rule (the free-shipping threshold) - valuable. The general rule: test the behavior YOU wrote. Not that `int` can add or FastAPI can FastAPI or sqlite can sqlite. This is the single most common way beginners waste time on tests - hundreds of assertions that are all 'yes, Python is Python.'</a:t>
-            </a:r>
-            <a:endParaRPr/>
+            <a:r>
+              <a:t>Show of hands per option. Answer C, D: A tests Python, B tests sqlite.</a:t>
+            </a:r>
           </a:p>
         </p:txBody>
       </p:sp>
@@ -4521,51 +4208,9 @@
           </a:bodyPr>
           <a:lstStyle/>
           <a:p>
-            <a:pPr indent="0" lvl="0" marL="0" rtl="0" algn="l">
-              <a:spcBef>
-                <a:spcPts val="0"/>
-              </a:spcBef>
-              <a:spcAft>
-                <a:spcPts val="0"/>
-              </a:spcAft>
-              <a:buNone/>
-            </a:pPr>
-            <a:r>
-              <a:rPr lang="en-US"/>
-              <a:t>Everything up to here has been tests as executable memory. Now they're also a design tool, and honestly that might be the half that matters more.</a:t>
-            </a:r>
-            <a:endParaRPr/>
-          </a:p>
-          <a:p>
-            <a:pPr indent="0" lvl="0" marL="0" rtl="0" algn="l">
-              <a:spcBef>
-                <a:spcPts val="0"/>
-              </a:spcBef>
-              <a:spcAft>
-                <a:spcPts val="0"/>
-              </a:spcAft>
-              <a:buNone/>
-            </a:pPr>
-            <a:r>
-              <a:t/>
-            </a:r>
-            <a:endParaRPr/>
-          </a:p>
-          <a:p>
-            <a:pPr indent="0" lvl="0" marL="0" rtl="0" algn="l">
-              <a:spcBef>
-                <a:spcPts val="0"/>
-              </a:spcBef>
-              <a:spcAft>
-                <a:spcPts val="0"/>
-              </a:spcAft>
-              <a:buNone/>
-            </a:pPr>
-            <a:r>
-              <a:rPr lang="en-US"/>
-              <a:t>If you’ve seen Superpowers, you may have seen “test-driven development”</a:t>
-            </a:r>
-            <a:endParaRPr/>
+            <a:r>
+              <a:t>Mention Superpowers TDD if they've seen it.</a:t>
+            </a:r>
           </a:p>
         </p:txBody>
       </p:sp>
@@ -4703,20 +4348,9 @@
           </a:bodyPr>
           <a:lstStyle/>
           <a:p>
-            <a:pPr indent="0" lvl="0" marL="0" rtl="0" algn="l">
-              <a:spcBef>
-                <a:spcPts val="0"/>
-              </a:spcBef>
-              <a:spcAft>
-                <a:spcPts val="0"/>
-              </a:spcAft>
-              <a:buNone/>
-            </a:pPr>
-            <a:r>
-              <a:rPr lang="en-US"/>
-              <a:t>The trick is to make students notice that they're already doing design work when they write a test. They just usually do it AFTER they've already made the decisions. TDD is just moving that work earlier so it can actually influence the code.</a:t>
-            </a:r>
-            <a:endParaRPr/>
+            <a:r>
+              <a:t>Writing a test is already design work, TDD moves it earlier.</a:t>
+            </a:r>
           </a:p>
         </p:txBody>
       </p:sp>
@@ -4854,20 +4488,9 @@
           </a:bodyPr>
           <a:lstStyle/>
           <a:p>
-            <a:pPr indent="0" lvl="0" marL="0" rtl="0" algn="l">
-              <a:spcBef>
-                <a:spcPts val="0"/>
-              </a:spcBef>
-              <a:spcAft>
-                <a:spcPts val="0"/>
-              </a:spcAft>
-              <a:buNone/>
-            </a:pPr>
-            <a:r>
-              <a:rPr lang="en-US"/>
-              <a:t>The trick is to make students notice that they're already doing design work when they write a test. They just usually do it AFTER they've already made the decisions. TDD is just moving that work earlier so it can actually influence the code.</a:t>
-            </a:r>
-            <a:endParaRPr/>
+            <a:r>
+              <a:t>Writing a test is already design work, TDD moves it earlier.</a:t>
+            </a:r>
           </a:p>
         </p:txBody>
       </p:sp>
@@ -5005,20 +4628,9 @@
           </a:bodyPr>
           <a:lstStyle/>
           <a:p>
-            <a:pPr indent="0" lvl="0" marL="0" rtl="0" algn="l">
-              <a:spcBef>
-                <a:spcPts val="0"/>
-              </a:spcBef>
-              <a:spcAft>
-                <a:spcPts val="0"/>
-              </a:spcAft>
-              <a:buNone/>
-            </a:pPr>
-            <a:r>
-              <a:rPr lang="en-US"/>
-              <a:t>The trick is to make students notice that they're already doing design work when they write a test. They just usually do it AFTER they've already made the decisions. TDD is just moving that work earlier so it can actually influence the code.</a:t>
-            </a:r>
-            <a:endParaRPr/>
+            <a:r>
+              <a:t>Writing a test is already design work, TDD moves it earlier.</a:t>
+            </a:r>
           </a:p>
         </p:txBody>
       </p:sp>
@@ -5156,20 +4768,9 @@
           </a:bodyPr>
           <a:lstStyle/>
           <a:p>
-            <a:pPr indent="0" lvl="0" marL="0" rtl="0" algn="l">
-              <a:spcBef>
-                <a:spcPts val="0"/>
-              </a:spcBef>
-              <a:spcAft>
-                <a:spcPts val="0"/>
-              </a:spcAft>
-              <a:buNone/>
-            </a:pPr>
-            <a:r>
-              <a:rPr lang="en-US"/>
-              <a:t>This is the part most students won't have heard before. Coverage and catching bugs are downstream effects of TDD, and the actual mechanism is that it forces you into the design decisions at the moment they're cheapest to change.</a:t>
-            </a:r>
-            <a:endParaRPr/>
+            <a:r>
+              <a:t>Decisions get made when cheapest to change.</a:t>
+            </a:r>
           </a:p>
         </p:txBody>
       </p:sp>
@@ -5307,66 +4908,9 @@
           </a:bodyPr>
           <a:lstStyle/>
           <a:p>
-            <a:pPr indent="0" lvl="0" marL="0" rtl="0" algn="l">
-              <a:spcBef>
-                <a:spcPts val="0"/>
-              </a:spcBef>
-              <a:spcAft>
-                <a:spcPts val="0"/>
-              </a:spcAft>
-              <a:buNone/>
-            </a:pPr>
-            <a:r>
-              <a:rPr lang="en-US"/>
-              <a:t>Don't oversell TDD as a panacea. Some code is hard to test first (UI, exploratory prototypes). For a function like shipping_cost or format_file_size, it is almost always worth trying.</a:t>
-            </a:r>
-            <a:endParaRPr/>
-          </a:p>
-          <a:p>
-            <a:pPr indent="0" lvl="0" marL="0" rtl="0" algn="l">
-              <a:spcBef>
-                <a:spcPts val="0"/>
-              </a:spcBef>
-              <a:spcAft>
-                <a:spcPts val="0"/>
-              </a:spcAft>
-              <a:buNone/>
-            </a:pPr>
-            <a:r>
-              <a:t/>
-            </a:r>
-            <a:endParaRPr/>
-          </a:p>
-          <a:p>
-            <a:pPr indent="0" lvl="0" marL="0" rtl="0" algn="l">
-              <a:spcBef>
-                <a:spcPts val="0"/>
-              </a:spcBef>
-              <a:spcAft>
-                <a:spcPts val="0"/>
-              </a:spcAft>
-              <a:buNone/>
-            </a:pPr>
-            <a:r>
-              <a:rPr lang="en-US"/>
-              <a:t>Not a religion, not always right. But more often the right tool than you'd think, especially for pure functions.</a:t>
-            </a:r>
-            <a:endParaRPr/>
-          </a:p>
-          <a:p>
-            <a:pPr indent="0" lvl="0" marL="0" rtl="0" algn="l">
-              <a:spcBef>
-                <a:spcPts val="0"/>
-              </a:spcBef>
-              <a:spcAft>
-                <a:spcPts val="0"/>
-              </a:spcAft>
-              <a:buNone/>
-            </a:pPr>
-            <a:r>
-              <a:t/>
-            </a:r>
-            <a:endParaRPr/>
+            <a:r>
+              <a:t>Don't oversell. Hard to test-first: UI, exploratory prototypes. Best for pure functions.</a:t>
+            </a:r>
           </a:p>
         </p:txBody>
       </p:sp>
@@ -5504,20 +5048,9 @@
           </a:bodyPr>
           <a:lstStyle/>
           <a:p>
-            <a:pPr indent="0" lvl="0" marL="0" rtl="0" algn="l">
-              <a:spcBef>
-                <a:spcPts val="0"/>
-              </a:spcBef>
-              <a:spcAft>
-                <a:spcPts val="0"/>
-              </a:spcAft>
-              <a:buNone/>
-            </a:pPr>
-            <a:r>
-              <a:rPr lang="en-US"/>
-              <a:t>The exercise is partly about the answers and partly about noticing that you can't fill in the blanks without making design decisions: should 1024 be '1 KB' or '1.0 KB'? Should 0 be '0 B' or '0 bytes' or '0'? There aren't wrong answers here, just decisions somebody has to make.</a:t>
-            </a:r>
-            <a:endParaRPr/>
+            <a:r>
+              <a:t>No wrong answers: '1 KB' vs '1.0 KB', '0 B' vs '0 bytes' are decisions.</a:t>
+            </a:r>
           </a:p>
         </p:txBody>
       </p:sp>
@@ -5655,24 +5188,9 @@
           </a:bodyPr>
           <a:lstStyle/>
           <a:p>
-            <a:pPr indent="0" lvl="0" marL="0" rtl="0" algn="l">
-              <a:spcBef>
-                <a:spcPts val="0"/>
-              </a:spcBef>
-              <a:spcAft>
-                <a:spcPts val="0"/>
-              </a:spcAft>
-              <a:buNone/>
-            </a:pPr>
-            <a:r>
-              <a:rPr lang="en-US"/>
-              <a:t>T</a:t>
-            </a:r>
-            <a:r>
-              <a:rPr lang="en-US"/>
-              <a:t>he exercise is partly about the answers and partly about noticing that you can't fill in the blanks without making design decisions: should 1024 be '1 KB' or '1.0 KB'? Should 0 be '0 B' or '0 bytes' or '0'? There aren't wrong answers here, just decisions somebody has to make.</a:t>
-            </a:r>
-            <a:endParaRPr/>
+            <a:r>
+              <a:t>No wrong answers: '1 KB' vs '1.0 KB', '0 B' vs '0 bytes' are decisions.</a:t>
+            </a:r>
           </a:p>
         </p:txBody>
       </p:sp>
@@ -5810,20 +5328,9 @@
           </a:bodyPr>
           <a:lstStyle/>
           <a:p>
-            <a:pPr indent="0" lvl="0" marL="0" rtl="0" algn="l">
-              <a:spcBef>
-                <a:spcPts val="0"/>
-              </a:spcBef>
-              <a:spcAft>
-                <a:spcPts val="0"/>
-              </a:spcAft>
-              <a:buNone/>
-            </a:pPr>
-            <a:r>
-              <a:rPr lang="en-US"/>
-              <a:t>Walk through the implementation and point at each line where a test pinned down a decision. The integer-vs-float formatting is the cleanest example: test_small_number_of_bytes forced us to use no decimals for bytes, while test_exactly_one_kilobyte forced us to use one decimal for everything else. Nobody sat down and decided that separately - the tests made us commit to it before a line of the implementation existed.</a:t>
-            </a:r>
-            <a:endParaRPr/>
+            <a:r>
+              <a:t>Point at lines a test pinned: no decimals for bytes, one decimal above 1024.</a:t>
+            </a:r>
           </a:p>
         </p:txBody>
       </p:sp>
@@ -5961,20 +5468,9 @@
           </a:bodyPr>
           <a:lstStyle/>
           <a:p>
-            <a:pPr indent="0" lvl="0" marL="0" rtl="0" algn="l">
-              <a:spcBef>
-                <a:spcPts val="0"/>
-              </a:spcBef>
-              <a:spcAft>
-                <a:spcPts val="0"/>
-              </a:spcAft>
-              <a:buNone/>
-            </a:pPr>
-            <a:r>
-              <a:rPr lang="en-US"/>
-              <a:t>Deliberate opening question. Don't start with 'testing is important.' Start by asking students to reckon with what they did last week.</a:t>
-            </a:r>
-            <a:endParaRPr/>
+            <a:r>
+              <a:t>Ask what they did last week to check their code.</a:t>
+            </a:r>
           </a:p>
         </p:txBody>
       </p:sp>
@@ -6112,20 +5608,9 @@
           </a:bodyPr>
           <a:lstStyle/>
           <a:p>
-            <a:pPr indent="0" lvl="0" marL="0" rtl="0" algn="l">
-              <a:spcBef>
-                <a:spcPts val="0"/>
-              </a:spcBef>
-              <a:spcAft>
-                <a:spcPts val="0"/>
-              </a:spcAft>
-              <a:buNone/>
-            </a:pPr>
-            <a:r>
-              <a:rPr lang="en-US"/>
-              <a:t>Summary of the two insights, then forward reference. Assignment 2 will have testing requirements starting at bronze tier, so students need to take 4.2 seriously.</a:t>
-            </a:r>
-            <a:endParaRPr/>
+            <a:r>
+              <a:t>A2 has testing requirements from bronze tier on.</a:t>
+            </a:r>
           </a:p>
         </p:txBody>
       </p:sp>
@@ -6262,22 +5747,7 @@
             <a:noAutofit/>
           </a:bodyPr>
           <a:lstStyle/>
-          <a:p>
-            <a:pPr indent="0" lvl="0" marL="0" rtl="0" algn="l">
-              <a:spcBef>
-                <a:spcPts val="0"/>
-              </a:spcBef>
-              <a:spcAft>
-                <a:spcPts val="0"/>
-              </a:spcAft>
-              <a:buNone/>
-            </a:pPr>
-            <a:r>
-              <a:rPr lang="en-US"/>
-              <a:t>4.1 taught the fundamentals on pure functions. Now reality hits.</a:t>
-            </a:r>
-            <a:endParaRPr/>
-          </a:p>
+          <a:p/>
         </p:txBody>
       </p:sp>
       <p:sp>
@@ -6414,20 +5884,9 @@
           </a:bodyPr>
           <a:lstStyle/>
           <a:p>
-            <a:pPr indent="0" lvl="0" marL="0" rtl="0" algn="l">
-              <a:spcBef>
-                <a:spcPts val="0"/>
-              </a:spcBef>
-              <a:spcAft>
-                <a:spcPts val="0"/>
-              </a:spcAft>
-              <a:buNone/>
-            </a:pPr>
-            <a:r>
-              <a:rPr lang="en-US"/>
-              <a:t>Set up the contrast between pure functions (easy) and the real code students wrote last week (hard). Don't explain why yet - make them see it on the next slide.</a:t>
-            </a:r>
-            <a:endParaRPr/>
+            <a:r>
+              <a:t>Don't explain why yet, next slide.</a:t>
+            </a:r>
           </a:p>
         </p:txBody>
       </p:sp>
@@ -6565,67 +6024,9 @@
           </a:bodyPr>
           <a:lstStyle/>
           <a:p>
-            <a:pPr indent="0" lvl="0" marL="0" rtl="0" algn="l">
-              <a:spcBef>
-                <a:spcPts val="0"/>
-              </a:spcBef>
-              <a:spcAft>
-                <a:spcPts val="0"/>
-              </a:spcAft>
-              <a:buNone/>
-            </a:pPr>
-            <a:r>
-              <a:rPr lang="en-US"/>
-              <a:t>Every item on this list turns into a mini-section of the lecture, and 'control the world around your code' is the phrase to keep coming back to.</a:t>
-            </a:r>
-            <a:endParaRPr/>
-          </a:p>
-          <a:p>
-            <a:pPr indent="0" lvl="0" marL="0" rtl="0" algn="l">
-              <a:spcBef>
-                <a:spcPts val="0"/>
-              </a:spcBef>
-              <a:spcAft>
-                <a:spcPts val="0"/>
-              </a:spcAft>
-              <a:buNone/>
-            </a:pPr>
-            <a:r>
-              <a:rPr lang="en-US"/>
-              <a:t>The trick of practical testing is one phrase:</a:t>
-            </a:r>
-            <a:endParaRPr/>
-          </a:p>
-          <a:p>
-            <a:pPr indent="0" lvl="0" marL="0" rtl="0" algn="l">
-              <a:spcBef>
-                <a:spcPts val="0"/>
-              </a:spcBef>
-              <a:spcAft>
-                <a:spcPts val="0"/>
-              </a:spcAft>
-              <a:buNone/>
-            </a:pPr>
-            <a:r>
-              <a:rPr lang="en-US"/>
-              <a:t>control the world around your code.</a:t>
-            </a:r>
-            <a:endParaRPr/>
-          </a:p>
-          <a:p>
-            <a:pPr indent="0" lvl="0" marL="0" rtl="0" algn="l">
-              <a:spcBef>
-                <a:spcPts val="0"/>
-              </a:spcBef>
-              <a:spcAft>
-                <a:spcPts val="0"/>
-              </a:spcAft>
-              <a:buNone/>
-            </a:pPr>
-            <a:r>
-              <a:t/>
-            </a:r>
-            <a:endParaRPr/>
+            <a:r>
+              <a:t>Each item becomes a mini-section. Phrase: control the world around your code.</a:t>
+            </a:r>
           </a:p>
         </p:txBody>
       </p:sp>
@@ -6763,20 +6164,9 @@
           </a:bodyPr>
           <a:lstStyle/>
           <a:p>
-            <a:pPr indent="0" lvl="0" marL="0" rtl="0" algn="l">
-              <a:spcBef>
-                <a:spcPts val="0"/>
-              </a:spcBef>
-              <a:spcAft>
-                <a:spcPts val="0"/>
-              </a:spcAft>
-              <a:buNone/>
-            </a:pPr>
-            <a:r>
-              <a:rPr lang="en-US"/>
-              <a:t>This test works. Technically. It spins up the real uvicorn, hits the real endpoint, and checks the real response. Every dependency is real - which is exactly the problem. Read it out loud line by line before the discussion slide.</a:t>
-            </a:r>
-            <a:endParaRPr/>
+            <a:r>
+              <a:t>Read aloud line by line before discussion slide. It works, every dependency is real.</a:t>
+            </a:r>
           </a:p>
         </p:txBody>
       </p:sp>
@@ -6914,20 +6304,9 @@
           </a:bodyPr>
           <a:lstStyle/>
           <a:p>
-            <a:pPr indent="0" lvl="0" marL="0" rtl="0" algn="l">
-              <a:spcBef>
-                <a:spcPts val="0"/>
-              </a:spcBef>
-              <a:spcAft>
-                <a:spcPts val="0"/>
-              </a:spcAft>
-              <a:buNone/>
-            </a:pPr>
-            <a:r>
-              <a:rPr lang="en-US"/>
-              <a:t>Most of these came out of the last discussion. Go quickly; students have already internalized the first two. Spend the most time on deterministic and independent, which are newer to them and will come up in 4.2 when we talk about databases and fixtures.</a:t>
-            </a:r>
-            <a:endParaRPr/>
+            <a:r>
+              <a:t>Go quickly. Most time on deterministic and independent, both return in 4.2.</a:t>
+            </a:r>
           </a:p>
         </p:txBody>
       </p:sp>
@@ -7364,22 +6743,7 @@
             <a:noAutofit/>
           </a:bodyPr>
           <a:lstStyle/>
-          <a:p>
-            <a:pPr indent="0" lvl="0" marL="0" rtl="0" algn="l">
-              <a:spcBef>
-                <a:spcPts val="0"/>
-              </a:spcBef>
-              <a:spcAft>
-                <a:spcPts val="0"/>
-              </a:spcAft>
-              <a:buNone/>
-            </a:pPr>
-            <a:r>
-              <a:rPr lang="en-US"/>
-              <a:t>This has a name - manual verification</a:t>
-            </a:r>
-            <a:endParaRPr/>
-          </a:p>
+          <a:p/>
         </p:txBody>
       </p:sp>
       <p:sp>
@@ -7516,66 +6880,9 @@
           </a:bodyPr>
           <a:lstStyle/>
           <a:p>
-            <a:pPr indent="0" lvl="0" marL="0" rtl="0" algn="l">
-              <a:spcBef>
-                <a:spcPts val="0"/>
-              </a:spcBef>
-              <a:spcAft>
-                <a:spcPts val="0"/>
-              </a:spcAft>
-              <a:buNone/>
-            </a:pPr>
-            <a:r>
-              <a:rPr lang="en-US"/>
-              <a:t>Careful here - what we're picking apart is one specific inadequate kind of testing, not the idea of checking your work by hand.</a:t>
-            </a:r>
-            <a:endParaRPr/>
-          </a:p>
-          <a:p>
-            <a:pPr indent="0" lvl="0" marL="0" rtl="0" algn="l">
-              <a:spcBef>
-                <a:spcPts val="0"/>
-              </a:spcBef>
-              <a:spcAft>
-                <a:spcPts val="0"/>
-              </a:spcAft>
-              <a:buNone/>
-            </a:pPr>
-            <a:r>
-              <a:t/>
-            </a:r>
-            <a:endParaRPr/>
-          </a:p>
-          <a:p>
-            <a:pPr indent="0" lvl="0" marL="0" rtl="0" algn="l">
-              <a:spcBef>
-                <a:spcPts val="0"/>
-              </a:spcBef>
-              <a:spcAft>
-                <a:spcPts val="0"/>
-              </a:spcAft>
-              <a:buNone/>
-            </a:pPr>
-            <a:r>
-              <a:rPr lang="en-US"/>
-              <a:t>Before we pick it apart, let's see what you'd naturally reach for.</a:t>
-            </a:r>
-            <a:endParaRPr/>
-          </a:p>
-          <a:p>
-            <a:pPr indent="0" lvl="0" marL="0" rtl="0" algn="l">
-              <a:spcBef>
-                <a:spcPts val="0"/>
-              </a:spcBef>
-              <a:spcAft>
-                <a:spcPts val="0"/>
-              </a:spcAft>
-              <a:buNone/>
-            </a:pPr>
-            <a:r>
-              <a:t/>
-            </a:r>
-            <a:endParaRPr/>
+            <a:r>
+              <a:t>Target is one inadequate kind of testing, checking by hand is fine.</a:t>
+            </a:r>
           </a:p>
         </p:txBody>
       </p:sp>
@@ -7713,20 +7020,9 @@
           </a:bodyPr>
           <a:lstStyle/>
           <a:p>
-            <a:pPr indent="0" lvl="0" marL="0" rtl="0" algn="l">
-              <a:spcBef>
-                <a:spcPts val="0"/>
-              </a:spcBef>
-              <a:spcAft>
-                <a:spcPts val="0"/>
-              </a:spcAft>
-              <a:buNone/>
-            </a:pPr>
-            <a:r>
-              <a:rPr lang="en-US"/>
-              <a:t>Show this, read it out loud, then put the discussion slide up. Don't explain it. Let students figure out what it's doing. The details they notice (edge cases, rounding, etc.) will come out in the discussion. This function is our running example for the whole pytest section, so leave it on the board mentally.</a:t>
-            </a:r>
-            <a:endParaRPr/>
+            <a:r>
+              <a:t>Read aloud, don't explain. Running example for the whole pytest section.</a:t>
+            </a:r>
           </a:p>
         </p:txBody>
       </p:sp>
